--- a/builder/assets/reference-pages/causal-chain.pptx
+++ b/builder/assets/reference-pages/causal-chain.pptx
@@ -1253,7 +1253,7 @@
                   <a:srgbClr val="172033"/>
                 </a:solidFill>
               </a:rPr>
-              <a:t>交付周期延长</a:t>
+              <a:t>Extended lead time</a:t>
             </a:r>
           </a:p>
         </p:txBody>
@@ -1309,7 +1309,7 @@
                   <a:srgbClr val="172033"/>
                 </a:solidFill>
               </a:rPr>
-              <a:t>跨部门确认时间过长</a:t>
+              <a:t>Cross-department confirmation takes too long</a:t>
             </a:r>
           </a:p>
         </p:txBody>
@@ -1365,7 +1365,7 @@
                   <a:srgbClr val="172033"/>
                 </a:solidFill>
               </a:rPr>
-              <a:t>需求频繁变更</a:t>
+              <a:t>Requirements change frequently</a:t>
             </a:r>
           </a:p>
         </p:txBody>
@@ -1421,7 +1421,7 @@
                   <a:srgbClr val="172033"/>
                 </a:solidFill>
               </a:rPr>
-              <a:t>关键岗位资源不足</a:t>
+              <a:t>Insufficient resources for key positions</a:t>
             </a:r>
           </a:p>
         </p:txBody>
@@ -1477,7 +1477,7 @@
                   <a:srgbClr val="172033"/>
                 </a:solidFill>
               </a:rPr>
-              <a:t>推迟了关键决策</a:t>
+              <a:t>Delaying key decisions</a:t>
             </a:r>
           </a:p>
         </p:txBody>
@@ -1533,7 +1533,7 @@
                   <a:srgbClr val="172033"/>
                 </a:solidFill>
               </a:rPr>
-              <a:t>返工</a:t>
+              <a:t>Rework</a:t>
             </a:r>
           </a:p>
         </p:txBody>
@@ -1589,7 +1589,7 @@
                   <a:srgbClr val="172033"/>
                 </a:solidFill>
               </a:rPr>
-              <a:t>拉长了任务等待时间</a:t>
+              <a:t>Extended task waiting time</a:t>
             </a:r>
           </a:p>
         </p:txBody>
@@ -1645,7 +1645,7 @@
                   <a:srgbClr val="172033"/>
                 </a:solidFill>
               </a:rPr>
-              <a:t>交付周期延长</a:t>
+              <a:t>Extended lead time</a:t>
             </a:r>
           </a:p>
         </p:txBody>
